--- a/Development_D3/Guided_Practice/D3-L12_Practice_Room_Review_and_Unit_Assessment_Work_and_Careers.pptx
+++ b/Development_D3/Guided_Practice/D3-L12_Practice_Room_Review_and_Unit_Assessment_Work_and_Careers.pptx
@@ -12228,11 +12228,11 @@
           <a:bodyPr wrap="square" lIns="0" tIns="0" rIns="0" bIns="0" rtlCol="0" anchor="ctr"/>
           <a:lstStyle/>
           <a:p>
-            <a:pPr algn="l" indent="0" marL="0">
-              <a:buNone/>
-            </a:pPr>
-            <a:r>
-              <a:rPr lang="ar-SA" altLang="en-US" sz="3900" b="1" dirty="0">
+            <a:pPr rtl="1" algn="r" indent="0" marL="0">
+              <a:buNone/>
+            </a:pPr>
+            <a:r>
+              <a:rPr lang="ar-SA" altLang="en-US" sz="3000" b="1" dirty="0">
                 <a:solidFill>
                   <a:srgbClr val="B83227"/>
                 </a:solidFill>
@@ -12240,22 +12240,9 @@
                 <a:ea typeface="Amiri" pitchFamily="2" charset="-78"/>
                 <a:cs typeface="Amiri" pitchFamily="2" charset="-78"/>
               </a:rPr>
-              <a:t>يَسُرُّنِي أَنْ أَتَقَدَّمُ وَأَنَا مُنَاسِبٌ</a:t>
-            </a:r>
-            <a:pPr algn="l" indent="0" marL="0">
-              <a:buNone/>
-            </a:pPr>
-            <a:r>
-              <a:rPr lang="en-US" sz="3000" b="1" dirty="0">
-                <a:solidFill>
-                  <a:srgbClr val="B83227"/>
-                </a:solidFill>
-                <a:latin typeface="Calibri" pitchFamily="34" charset="0"/>
-                <a:cs typeface="Amiri" pitchFamily="2" charset="-78"/>
-              </a:rPr>
-              <a:t>. (f. writer)</a:t>
-            </a:r>
-            <a:endParaRPr lang="en-US" sz="3000" dirty="0"/>
+              <a:t>يَسُرُّنِي أَنْ أَتَقَدَّمُ وَأَنَا مُنَاسِبٌ.</a:t>
+            </a:r>
+            <a:endParaRPr lang="ar-SA" sz="3000" dirty="0"/>
           </a:p>
         </p:txBody>
       </p:sp>
@@ -12291,7 +12278,7 @@
                 <a:latin typeface="Calibri" pitchFamily="34" charset="0"/>
                 <a:cs typeface="Amiri" pitchFamily="2" charset="-78"/>
               </a:rPr>
-              <a:t>Two errors.</a:t>
+              <a:t>Two errors — the writer is a girl.</a:t>
             </a:r>
             <a:endParaRPr lang="en-US" sz="1300" dirty="0"/>
           </a:p>
@@ -13365,11 +13352,11 @@
           <a:bodyPr wrap="square" lIns="0" tIns="0" rIns="0" bIns="0" rtlCol="0" anchor="ctr"/>
           <a:lstStyle/>
           <a:p>
-            <a:pPr algn="l" indent="0" marL="0">
-              <a:buNone/>
-            </a:pPr>
-            <a:r>
-              <a:rPr lang="ar-SA" altLang="en-US" sz="2350" dirty="0">
+            <a:pPr rtl="1" algn="r" indent="0" marL="0">
+              <a:buNone/>
+            </a:pPr>
+            <a:r>
+              <a:rPr lang="ar-SA" altLang="en-US" sz="1800" b="1" dirty="0">
                 <a:solidFill>
                   <a:srgbClr val="B83227"/>
                 </a:solidFill>
@@ -13377,22 +13364,9 @@
                 <a:ea typeface="Amiri" pitchFamily="2" charset="-78"/>
                 <a:cs typeface="Amiri" pitchFamily="2" charset="-78"/>
               </a:rPr>
-              <a:t>يَسُرُّنِي أَنْ أَتَقَدَّمُ وَأَنَا مُنَاسِبٌ</a:t>
-            </a:r>
-            <a:pPr algn="l" indent="0" marL="0">
-              <a:buNone/>
-            </a:pPr>
-            <a:r>
-              <a:rPr lang="en-US" sz="1800" dirty="0">
-                <a:solidFill>
-                  <a:srgbClr val="B83227"/>
-                </a:solidFill>
-                <a:latin typeface="Calibri" pitchFamily="34" charset="0"/>
-                <a:cs typeface="Amiri" pitchFamily="2" charset="-78"/>
-              </a:rPr>
-              <a:t>. (f. writer)</a:t>
-            </a:r>
-            <a:endParaRPr lang="en-US" sz="1800" dirty="0"/>
+              <a:t>يَسُرُّنِي أَنْ أَتَقَدَّمُ وَأَنَا مُنَاسِبٌ.</a:t>
+            </a:r>
+            <a:endParaRPr lang="ar-SA" sz="1800" dirty="0"/>
           </a:p>
         </p:txBody>
       </p:sp>
@@ -14824,11 +14798,11 @@
           <a:bodyPr wrap="square" lIns="0" tIns="0" rIns="0" bIns="0" rtlCol="0" anchor="ctr"/>
           <a:lstStyle/>
           <a:p>
-            <a:pPr algn="l" indent="0" marL="0">
-              <a:buNone/>
-            </a:pPr>
-            <a:r>
-              <a:rPr lang="ar-SA" altLang="en-US" sz="2000" b="1" dirty="0">
+            <a:pPr rtl="1" algn="r" indent="0" marL="0">
+              <a:buNone/>
+            </a:pPr>
+            <a:r>
+              <a:rPr lang="ar-SA" altLang="en-US" sz="1600" b="1" dirty="0">
                 <a:solidFill>
                   <a:srgbClr val="1B3B6F"/>
                 </a:solidFill>
@@ -14836,252 +14810,9 @@
                 <a:ea typeface="Amiri" pitchFamily="2" charset="-78"/>
                 <a:cs typeface="Amiri" pitchFamily="2" charset="-78"/>
               </a:rPr>
-              <a:t>يَعْمَلُ / تَعْمَلُ</a:t>
-            </a:r>
-            <a:pPr algn="l" indent="0" marL="0">
-              <a:buNone/>
-            </a:pPr>
-            <a:r>
-              <a:rPr lang="en-US" sz="1550" b="1" dirty="0">
-                <a:solidFill>
-                  <a:srgbClr val="1B3B6F"/>
-                </a:solidFill>
-                <a:latin typeface="Calibri" pitchFamily="34" charset="0"/>
-                <a:cs typeface="Amiri" pitchFamily="2" charset="-78"/>
-              </a:rPr>
-              <a:t> + -an  ·  </a:t>
-            </a:r>
-            <a:pPr algn="l" indent="0" marL="0">
-              <a:buNone/>
-            </a:pPr>
-            <a:r>
-              <a:rPr lang="ar-SA" altLang="en-US" sz="2000" b="1" dirty="0">
-                <a:solidFill>
-                  <a:srgbClr val="1B3B6F"/>
-                </a:solidFill>
-                <a:latin typeface="Amiri" pitchFamily="2" charset="-78"/>
-                <a:ea typeface="Amiri" pitchFamily="2" charset="-78"/>
-                <a:cs typeface="Amiri" pitchFamily="2" charset="-78"/>
-              </a:rPr>
-              <a:t>مِنْ مَزَايَاهُ أَنَّ</a:t>
-            </a:r>
-            <a:pPr algn="l" indent="0" marL="0">
-              <a:buNone/>
-            </a:pPr>
-            <a:r>
-              <a:rPr lang="en-US" sz="1550" b="1" dirty="0">
-                <a:solidFill>
-                  <a:srgbClr val="1B3B6F"/>
-                </a:solidFill>
-                <a:latin typeface="Calibri" pitchFamily="34" charset="0"/>
-                <a:cs typeface="Amiri" pitchFamily="2" charset="-78"/>
-              </a:rPr>
-              <a:t>  ·  </a:t>
-            </a:r>
-            <a:pPr algn="l" indent="0" marL="0">
-              <a:buNone/>
-            </a:pPr>
-            <a:r>
-              <a:rPr lang="ar-SA" altLang="en-US" sz="2000" b="1" dirty="0">
-                <a:solidFill>
-                  <a:srgbClr val="1B3B6F"/>
-                </a:solidFill>
-                <a:latin typeface="Amiri" pitchFamily="2" charset="-78"/>
-                <a:ea typeface="Amiri" pitchFamily="2" charset="-78"/>
-                <a:cs typeface="Amiri" pitchFamily="2" charset="-78"/>
-              </a:rPr>
-              <a:t>يَحْتَاجُ إِلَى</a:t>
-            </a:r>
-            <a:pPr algn="l" indent="0" marL="0">
-              <a:buNone/>
-            </a:pPr>
-            <a:r>
-              <a:rPr lang="en-US" sz="1550" b="1" dirty="0">
-                <a:solidFill>
-                  <a:srgbClr val="1B3B6F"/>
-                </a:solidFill>
-                <a:latin typeface="Calibri" pitchFamily="34" charset="0"/>
-                <a:cs typeface="Amiri" pitchFamily="2" charset="-78"/>
-              </a:rPr>
-              <a:t>  ·  </a:t>
-            </a:r>
-            <a:pPr algn="l" indent="0" marL="0">
-              <a:buNone/>
-            </a:pPr>
-            <a:r>
-              <a:rPr lang="ar-SA" altLang="en-US" sz="2000" b="1" dirty="0">
-                <a:solidFill>
-                  <a:srgbClr val="1B3B6F"/>
-                </a:solidFill>
-                <a:latin typeface="Amiri" pitchFamily="2" charset="-78"/>
-                <a:ea typeface="Amiri" pitchFamily="2" charset="-78"/>
-                <a:cs typeface="Amiri" pitchFamily="2" charset="-78"/>
-              </a:rPr>
-              <a:t>يَجِبُ أَنْ يَكُونَ</a:t>
-            </a:r>
-            <a:pPr algn="l" indent="0" marL="0">
-              <a:buNone/>
-            </a:pPr>
-            <a:r>
-              <a:rPr lang="en-US" sz="1550" b="1" dirty="0">
-                <a:solidFill>
-                  <a:srgbClr val="1B3B6F"/>
-                </a:solidFill>
-                <a:latin typeface="Calibri" pitchFamily="34" charset="0"/>
-                <a:cs typeface="Amiri" pitchFamily="2" charset="-78"/>
-              </a:rPr>
-              <a:t>  ·  </a:t>
-            </a:r>
-            <a:pPr algn="l" indent="0" marL="0">
-              <a:buNone/>
-            </a:pPr>
-            <a:r>
-              <a:rPr lang="ar-SA" altLang="en-US" sz="2000" b="1" dirty="0">
-                <a:solidFill>
-                  <a:srgbClr val="1B3B6F"/>
-                </a:solidFill>
-                <a:latin typeface="Amiri" pitchFamily="2" charset="-78"/>
-                <a:ea typeface="Amiri" pitchFamily="2" charset="-78"/>
-                <a:cs typeface="Amiri" pitchFamily="2" charset="-78"/>
-              </a:rPr>
-              <a:t>أَطْمَحُ إِلَى أَنْ</a:t>
-            </a:r>
-            <a:pPr algn="l" indent="0" marL="0">
-              <a:buNone/>
-            </a:pPr>
-            <a:r>
-              <a:rPr lang="en-US" sz="1550" b="1" dirty="0">
-                <a:solidFill>
-                  <a:srgbClr val="1B3B6F"/>
-                </a:solidFill>
-                <a:latin typeface="Calibri" pitchFamily="34" charset="0"/>
-                <a:cs typeface="Amiri" pitchFamily="2" charset="-78"/>
-              </a:rPr>
-              <a:t>  ·  </a:t>
-            </a:r>
-            <a:pPr algn="l" indent="0" marL="0">
-              <a:buNone/>
-            </a:pPr>
-            <a:r>
-              <a:rPr lang="ar-SA" altLang="en-US" sz="2000" b="1" dirty="0">
-                <a:solidFill>
-                  <a:srgbClr val="1B3B6F"/>
-                </a:solidFill>
-                <a:latin typeface="Amiri" pitchFamily="2" charset="-78"/>
-                <a:ea typeface="Amiri" pitchFamily="2" charset="-78"/>
-                <a:cs typeface="Amiri" pitchFamily="2" charset="-78"/>
-              </a:rPr>
-              <a:t>سَأَدْرُسُ</a:t>
-            </a:r>
-            <a:pPr algn="l" indent="0" marL="0">
-              <a:buNone/>
-            </a:pPr>
-            <a:r>
-              <a:rPr lang="en-US" sz="1550" b="1" dirty="0">
-                <a:solidFill>
-                  <a:srgbClr val="1B3B6F"/>
-                </a:solidFill>
-                <a:latin typeface="Calibri" pitchFamily="34" charset="0"/>
-                <a:cs typeface="Amiri" pitchFamily="2" charset="-78"/>
-              </a:rPr>
-              <a:t> · </a:t>
-            </a:r>
-            <a:pPr algn="l" indent="0" marL="0">
-              <a:buNone/>
-            </a:pPr>
-            <a:r>
-              <a:rPr lang="ar-SA" altLang="en-US" sz="2000" b="1" dirty="0">
-                <a:solidFill>
-                  <a:srgbClr val="1B3B6F"/>
-                </a:solidFill>
-                <a:latin typeface="Amiri" pitchFamily="2" charset="-78"/>
-                <a:ea typeface="Amiri" pitchFamily="2" charset="-78"/>
-                <a:cs typeface="Amiri" pitchFamily="2" charset="-78"/>
-              </a:rPr>
-              <a:t>لَنْ</a:t>
-            </a:r>
-            <a:pPr algn="l" indent="0" marL="0">
-              <a:buNone/>
-            </a:pPr>
-            <a:r>
-              <a:rPr lang="en-US" sz="1550" b="1" dirty="0">
-                <a:solidFill>
-                  <a:srgbClr val="1B3B6F"/>
-                </a:solidFill>
-                <a:latin typeface="Calibri" pitchFamily="34" charset="0"/>
-                <a:cs typeface="Amiri" pitchFamily="2" charset="-78"/>
-              </a:rPr>
-              <a:t> + -a  ·  </a:t>
-            </a:r>
-            <a:pPr algn="l" indent="0" marL="0">
-              <a:buNone/>
-            </a:pPr>
-            <a:r>
-              <a:rPr lang="ar-SA" altLang="en-US" sz="2000" b="1" dirty="0">
-                <a:solidFill>
-                  <a:srgbClr val="1B3B6F"/>
-                </a:solidFill>
-                <a:latin typeface="Amiri" pitchFamily="2" charset="-78"/>
-                <a:ea typeface="Amiri" pitchFamily="2" charset="-78"/>
-                <a:cs typeface="Amiri" pitchFamily="2" charset="-78"/>
-              </a:rPr>
-              <a:t>لِكَيْ</a:t>
-            </a:r>
-            <a:pPr algn="l" indent="0" marL="0">
-              <a:buNone/>
-            </a:pPr>
-            <a:r>
-              <a:rPr lang="en-US" sz="1550" b="1" dirty="0">
-                <a:solidFill>
-                  <a:srgbClr val="1B3B6F"/>
-                </a:solidFill>
-                <a:latin typeface="Calibri" pitchFamily="34" charset="0"/>
-                <a:cs typeface="Amiri" pitchFamily="2" charset="-78"/>
-              </a:rPr>
-              <a:t> · </a:t>
-            </a:r>
-            <a:pPr algn="l" indent="0" marL="0">
-              <a:buNone/>
-            </a:pPr>
-            <a:r>
-              <a:rPr lang="ar-SA" altLang="en-US" sz="2000" b="1" dirty="0">
-                <a:solidFill>
-                  <a:srgbClr val="1B3B6F"/>
-                </a:solidFill>
-                <a:latin typeface="Amiri" pitchFamily="2" charset="-78"/>
-                <a:ea typeface="Amiri" pitchFamily="2" charset="-78"/>
-                <a:cs typeface="Amiri" pitchFamily="2" charset="-78"/>
-              </a:rPr>
-              <a:t>إِذَا</a:t>
-            </a:r>
-            <a:pPr algn="l" indent="0" marL="0">
-              <a:buNone/>
-            </a:pPr>
-            <a:r>
-              <a:rPr lang="en-US" sz="1550" b="1" dirty="0">
-                <a:solidFill>
-                  <a:srgbClr val="1B3B6F"/>
-                </a:solidFill>
-                <a:latin typeface="Calibri" pitchFamily="34" charset="0"/>
-                <a:cs typeface="Amiri" pitchFamily="2" charset="-78"/>
-              </a:rPr>
-              <a:t>  ·  </a:t>
-            </a:r>
-            <a:pPr algn="l" indent="0" marL="0">
-              <a:buNone/>
-            </a:pPr>
-            <a:r>
-              <a:rPr lang="ar-SA" altLang="en-US" sz="2000" b="1" dirty="0">
-                <a:solidFill>
-                  <a:srgbClr val="1B3B6F"/>
-                </a:solidFill>
-                <a:latin typeface="Amiri" pitchFamily="2" charset="-78"/>
-                <a:ea typeface="Amiri" pitchFamily="2" charset="-78"/>
-                <a:cs typeface="Amiri" pitchFamily="2" charset="-78"/>
-              </a:rPr>
-              <a:t>عَلَى الرَّغْمِ مِنْ أَنَّ</a:t>
-            </a:r>
-            <a:endParaRPr lang="en-US" sz="1550" dirty="0"/>
+              <a:t>يَعْمَلُ طَبِيبًا · تَعْمَلُ طَبِيبَةً  ·  مِنْ مَزَايَاهُ أَنَّ  ·  يَحْتَاجُ إِلَى  ·  يَجِبُ أَنْ يَكُونَ  ·  أَطْمَحُ إِلَى أَنْ  ·  سَأَدْرُسُ · لَنْ أَعْمَلَ  ·  لِكَيْ · إِذَا  ·  عَلَى الرَّغْمِ مِنْ أَنَّ</a:t>
+            </a:r>
+            <a:endParaRPr lang="ar-SA" sz="1600" dirty="0"/>
           </a:p>
         </p:txBody>
       </p:sp>
